--- a/PPT.pptx
+++ b/PPT.pptx
@@ -12,6 +12,7 @@
     <p:sldId id="257" r:id="rId7"/>
     <p:sldId id="258" r:id="rId8"/>
     <p:sldId id="259" r:id="rId9"/>
+    <p:sldId id="260" r:id="rId10"/>
   </p:sldIdLst>
   <p:sldSz cy="5143500" cx="9144000"/>
   <p:notesSz cx="6858000" cy="9144000"/>
@@ -906,7 +907,7 @@
       </p:grpSpPr>
       <p:sp>
         <p:nvSpPr>
-          <p:cNvPr id="65" name="Google Shape;65;g2fca1f944c7_2_9:notes"/>
+          <p:cNvPr id="65" name="Google Shape;65;g2fedc71aa75_0_0:notes"/>
           <p:cNvSpPr/>
           <p:nvPr>
             <p:ph idx="2" type="sldImg"/>
@@ -941,7 +942,7 @@
       </p:sp>
       <p:sp>
         <p:nvSpPr>
-          <p:cNvPr id="66" name="Google Shape;66;g2fca1f944c7_2_9:notes"/>
+          <p:cNvPr id="66" name="Google Shape;66;g2fedc71aa75_0_0:notes"/>
           <p:cNvSpPr txBox="1"/>
           <p:nvPr>
             <p:ph idx="1" type="body"/>
@@ -991,7 +992,7 @@
   <p:cSld>
     <p:spTree>
       <p:nvGrpSpPr>
-        <p:cNvPr id="69" name="Shape 69"/>
+        <p:cNvPr id="70" name="Shape 70"/>
         <p:cNvGrpSpPr/>
         <p:nvPr/>
       </p:nvGrpSpPr>
@@ -1005,7 +1006,7 @@
       </p:grpSpPr>
       <p:sp>
         <p:nvSpPr>
-          <p:cNvPr id="70" name="Google Shape;70;g2fca1f944c7_2_14:notes"/>
+          <p:cNvPr id="71" name="Google Shape;71;g2fca1f944c7_2_9:notes"/>
           <p:cNvSpPr/>
           <p:nvPr>
             <p:ph idx="2" type="sldImg"/>
@@ -1040,7 +1041,106 @@
       </p:sp>
       <p:sp>
         <p:nvSpPr>
-          <p:cNvPr id="71" name="Google Shape;71;g2fca1f944c7_2_14:notes"/>
+          <p:cNvPr id="72" name="Google Shape;72;g2fca1f944c7_2_9:notes"/>
+          <p:cNvSpPr txBox="1"/>
+          <p:nvPr>
+            <p:ph idx="1" type="body"/>
+          </p:nvPr>
+        </p:nvSpPr>
+        <p:spPr>
+          <a:xfrm>
+            <a:off x="685800" y="4343400"/>
+            <a:ext cx="5486400" cy="4114800"/>
+          </a:xfrm>
+          <a:prstGeom prst="rect">
+            <a:avLst/>
+          </a:prstGeom>
+        </p:spPr>
+        <p:txBody>
+          <a:bodyPr anchorCtr="0" anchor="t" bIns="91425" lIns="91425" spcFirstLastPara="1" rIns="91425" wrap="square" tIns="91425">
+            <a:noAutofit/>
+          </a:bodyPr>
+          <a:lstStyle/>
+          <a:p>
+            <a:pPr indent="0" lvl="0" marL="0" rtl="0" algn="l">
+              <a:spcBef>
+                <a:spcPts val="0"/>
+              </a:spcBef>
+              <a:spcAft>
+                <a:spcPts val="0"/>
+              </a:spcAft>
+              <a:buNone/>
+            </a:pPr>
+            <a:r>
+              <a:t/>
+            </a:r>
+            <a:endParaRPr/>
+          </a:p>
+        </p:txBody>
+      </p:sp>
+    </p:spTree>
+  </p:cSld>
+  <p:clrMapOvr>
+    <a:masterClrMapping/>
+  </p:clrMapOvr>
+</p:notes>
+</file>
+
+<file path=ppt/notesSlides/notesSlide5.xml><?xml version="1.0" encoding="utf-8"?>
+<p:notes xmlns:a="http://schemas.openxmlformats.org/drawingml/2006/main" xmlns:r="http://schemas.openxmlformats.org/officeDocument/2006/relationships" xmlns:mc="http://schemas.openxmlformats.org/markup-compatibility/2006" xmlns:mv="urn:schemas-microsoft-com:mac:vml" xmlns:p="http://schemas.openxmlformats.org/presentationml/2006/main" xmlns:c="http://schemas.openxmlformats.org/drawingml/2006/chart" xmlns:dgm="http://schemas.openxmlformats.org/drawingml/2006/diagram" xmlns:o="urn:schemas-microsoft-com:office:office" xmlns:v="urn:schemas-microsoft-com:vml" xmlns:pvml="urn:schemas-microsoft-com:office:powerpoint" xmlns:com="http://schemas.openxmlformats.org/drawingml/2006/compatibility" xmlns:p14="http://schemas.microsoft.com/office/powerpoint/2010/main" xmlns:p15="http://schemas.microsoft.com/office/powerpoint/2012/main" xmlns:ahyp="http://schemas.microsoft.com/office/drawing/2018/hyperlinkcolor" showMasterPhAnim="0" showMasterSp="0">
+  <p:cSld>
+    <p:spTree>
+      <p:nvGrpSpPr>
+        <p:cNvPr id="75" name="Shape 75"/>
+        <p:cNvGrpSpPr/>
+        <p:nvPr/>
+      </p:nvGrpSpPr>
+      <p:grpSpPr>
+        <a:xfrm>
+          <a:off x="0" y="0"/>
+          <a:ext cx="0" cy="0"/>
+          <a:chOff x="0" y="0"/>
+          <a:chExt cx="0" cy="0"/>
+        </a:xfrm>
+      </p:grpSpPr>
+      <p:sp>
+        <p:nvSpPr>
+          <p:cNvPr id="76" name="Google Shape;76;g2fca1f944c7_2_14:notes"/>
+          <p:cNvSpPr/>
+          <p:nvPr>
+            <p:ph idx="2" type="sldImg"/>
+          </p:nvPr>
+        </p:nvSpPr>
+        <p:spPr>
+          <a:xfrm>
+            <a:off x="381300" y="685800"/>
+            <a:ext cx="6096000" cy="3429000"/>
+          </a:xfrm>
+          <a:custGeom>
+            <a:rect b="b" l="l" r="r" t="t"/>
+            <a:pathLst>
+              <a:path extrusionOk="0" h="120000" w="120000">
+                <a:moveTo>
+                  <a:pt x="0" y="0"/>
+                </a:moveTo>
+                <a:lnTo>
+                  <a:pt x="120000" y="0"/>
+                </a:lnTo>
+                <a:lnTo>
+                  <a:pt x="120000" y="120000"/>
+                </a:lnTo>
+                <a:lnTo>
+                  <a:pt x="0" y="120000"/>
+                </a:lnTo>
+                <a:close/>
+              </a:path>
+            </a:pathLst>
+          </a:custGeom>
+        </p:spPr>
+      </p:sp>
+      <p:sp>
+        <p:nvSpPr>
+          <p:cNvPr id="77" name="Google Shape;77;g2fca1f944c7_2_14:notes"/>
           <p:cNvSpPr txBox="1"/>
           <p:nvPr>
             <p:ph idx="1" type="body"/>
@@ -6117,6 +6217,170 @@
         <p:spPr>
           <a:xfrm>
             <a:off x="311700" y="445025"/>
+            <a:ext cx="8520600" cy="572700"/>
+          </a:xfrm>
+          <a:prstGeom prst="rect">
+            <a:avLst/>
+          </a:prstGeom>
+        </p:spPr>
+        <p:txBody>
+          <a:bodyPr anchorCtr="0" anchor="t" bIns="91425" lIns="91425" spcFirstLastPara="1" rIns="91425" wrap="square" tIns="91425">
+            <a:normAutofit fontScale="90000"/>
+          </a:bodyPr>
+          <a:lstStyle/>
+          <a:p>
+            <a:pPr indent="0" lvl="0" marL="0" rtl="0" algn="l">
+              <a:spcBef>
+                <a:spcPts val="0"/>
+              </a:spcBef>
+              <a:spcAft>
+                <a:spcPts val="0"/>
+              </a:spcAft>
+              <a:buNone/>
+            </a:pPr>
+            <a:r>
+              <a:rPr lang="ko"/>
+              <a:t>OS - Application </a:t>
+            </a:r>
+            <a:r>
+              <a:rPr lang="ko"/>
+              <a:t>사이의 interface</a:t>
+            </a:r>
+            <a:endParaRPr/>
+          </a:p>
+        </p:txBody>
+      </p:sp>
+      <p:sp>
+        <p:nvSpPr>
+          <p:cNvPr id="69" name="Google Shape;69;p15"/>
+          <p:cNvSpPr txBox="1"/>
+          <p:nvPr>
+            <p:ph idx="1" type="body"/>
+          </p:nvPr>
+        </p:nvSpPr>
+        <p:spPr>
+          <a:xfrm>
+            <a:off x="311700" y="1152475"/>
+            <a:ext cx="8520600" cy="3416400"/>
+          </a:xfrm>
+          <a:prstGeom prst="rect">
+            <a:avLst/>
+          </a:prstGeom>
+        </p:spPr>
+        <p:txBody>
+          <a:bodyPr anchorCtr="0" anchor="t" bIns="91425" lIns="91425" spcFirstLastPara="1" rIns="91425" wrap="square" tIns="91425">
+            <a:normAutofit/>
+          </a:bodyPr>
+          <a:lstStyle/>
+          <a:p>
+            <a:pPr indent="-342900" lvl="0" marL="457200" rtl="0" algn="l">
+              <a:spcBef>
+                <a:spcPts val="0"/>
+              </a:spcBef>
+              <a:spcAft>
+                <a:spcPts val="0"/>
+              </a:spcAft>
+              <a:buSzPts val="1800"/>
+              <a:buAutoNum type="arabicPeriod"/>
+            </a:pPr>
+            <a:r>
+              <a:rPr lang="ko"/>
+              <a:t>요청 </a:t>
+            </a:r>
+            <a:br>
+              <a:rPr lang="ko"/>
+            </a:br>
+            <a:r>
+              <a:rPr lang="ko"/>
+              <a:t>API 호출</a:t>
+            </a:r>
+            <a:br>
+              <a:rPr lang="ko"/>
+            </a:br>
+            <a:br>
+              <a:rPr lang="ko"/>
+            </a:br>
+            <a:endParaRPr/>
+          </a:p>
+          <a:p>
+            <a:pPr indent="-342900" lvl="0" marL="457200" rtl="0" algn="l">
+              <a:spcBef>
+                <a:spcPts val="0"/>
+              </a:spcBef>
+              <a:spcAft>
+                <a:spcPts val="0"/>
+              </a:spcAft>
+              <a:buSzPts val="1800"/>
+              <a:buAutoNum type="arabicPeriod"/>
+            </a:pPr>
+            <a:r>
+              <a:rPr lang="ko"/>
+              <a:t>수신</a:t>
+            </a:r>
+            <a:br>
+              <a:rPr lang="ko"/>
+            </a:br>
+            <a:r>
+              <a:rPr lang="ko" u="sng">
+                <a:solidFill>
+                  <a:schemeClr val="hlink"/>
+                </a:solidFill>
+                <a:hlinkClick r:id="rId3"/>
+              </a:rPr>
+              <a:t>MESSAGE QUEUE</a:t>
+            </a:r>
+            <a:br>
+              <a:rPr lang="ko"/>
+            </a:br>
+            <a:r>
+              <a:rPr lang="ko" u="sng">
+                <a:solidFill>
+                  <a:schemeClr val="hlink"/>
+                </a:solidFill>
+                <a:hlinkClick r:id="rId4"/>
+              </a:rPr>
+              <a:t>MESSAGE LOOP</a:t>
+            </a:r>
+            <a:endParaRPr/>
+          </a:p>
+        </p:txBody>
+      </p:sp>
+    </p:spTree>
+  </p:cSld>
+  <p:clrMapOvr>
+    <a:masterClrMapping/>
+  </p:clrMapOvr>
+</p:sld>
+</file>
+
+<file path=ppt/slides/slide4.xml><?xml version="1.0" encoding="utf-8"?>
+<p:sld xmlns:a="http://schemas.openxmlformats.org/drawingml/2006/main" xmlns:r="http://schemas.openxmlformats.org/officeDocument/2006/relationships" xmlns:mc="http://schemas.openxmlformats.org/markup-compatibility/2006" xmlns:mv="urn:schemas-microsoft-com:mac:vml" xmlns:p="http://schemas.openxmlformats.org/presentationml/2006/main" xmlns:c="http://schemas.openxmlformats.org/drawingml/2006/chart" xmlns:dgm="http://schemas.openxmlformats.org/drawingml/2006/diagram" xmlns:o="urn:schemas-microsoft-com:office:office" xmlns:v="urn:schemas-microsoft-com:vml" xmlns:pvml="urn:schemas-microsoft-com:office:powerpoint" xmlns:com="http://schemas.openxmlformats.org/drawingml/2006/compatibility" xmlns:p14="http://schemas.microsoft.com/office/powerpoint/2010/main" xmlns:p15="http://schemas.microsoft.com/office/powerpoint/2012/main" xmlns:ahyp="http://schemas.microsoft.com/office/drawing/2018/hyperlinkcolor">
+  <p:cSld>
+    <p:spTree>
+      <p:nvGrpSpPr>
+        <p:cNvPr id="73" name="Shape 73"/>
+        <p:cNvGrpSpPr/>
+        <p:nvPr/>
+      </p:nvGrpSpPr>
+      <p:grpSpPr>
+        <a:xfrm>
+          <a:off x="0" y="0"/>
+          <a:ext cx="0" cy="0"/>
+          <a:chOff x="0" y="0"/>
+          <a:chExt cx="0" cy="0"/>
+        </a:xfrm>
+      </p:grpSpPr>
+      <p:sp>
+        <p:nvSpPr>
+          <p:cNvPr id="74" name="Google Shape;74;p16"/>
+          <p:cNvSpPr txBox="1"/>
+          <p:nvPr>
+            <p:ph type="title"/>
+          </p:nvPr>
+        </p:nvSpPr>
+        <p:spPr>
+          <a:xfrm>
+            <a:off x="311700" y="445025"/>
             <a:ext cx="8520600" cy="4182600"/>
           </a:xfrm>
           <a:prstGeom prst="rect">
@@ -6158,12 +6422,12 @@
 </p:sld>
 </file>
 
-<file path=ppt/slides/slide4.xml><?xml version="1.0" encoding="utf-8"?>
+<file path=ppt/slides/slide5.xml><?xml version="1.0" encoding="utf-8"?>
 <p:sld xmlns:a="http://schemas.openxmlformats.org/drawingml/2006/main" xmlns:r="http://schemas.openxmlformats.org/officeDocument/2006/relationships" xmlns:mc="http://schemas.openxmlformats.org/markup-compatibility/2006" xmlns:mv="urn:schemas-microsoft-com:mac:vml" xmlns:p="http://schemas.openxmlformats.org/presentationml/2006/main" xmlns:c="http://schemas.openxmlformats.org/drawingml/2006/chart" xmlns:dgm="http://schemas.openxmlformats.org/drawingml/2006/diagram" xmlns:o="urn:schemas-microsoft-com:office:office" xmlns:v="urn:schemas-microsoft-com:vml" xmlns:pvml="urn:schemas-microsoft-com:office:powerpoint" xmlns:com="http://schemas.openxmlformats.org/drawingml/2006/compatibility" xmlns:p14="http://schemas.microsoft.com/office/powerpoint/2010/main" xmlns:p15="http://schemas.microsoft.com/office/powerpoint/2012/main" xmlns:ahyp="http://schemas.microsoft.com/office/drawing/2018/hyperlinkcolor">
   <p:cSld>
     <p:spTree>
       <p:nvGrpSpPr>
-        <p:cNvPr id="72" name="Shape 72"/>
+        <p:cNvPr id="78" name="Shape 78"/>
         <p:cNvGrpSpPr/>
         <p:nvPr/>
       </p:nvGrpSpPr>
@@ -6177,7 +6441,7 @@
       </p:grpSpPr>
       <p:sp>
         <p:nvSpPr>
-          <p:cNvPr id="73" name="Google Shape;73;p16"/>
+          <p:cNvPr id="79" name="Google Shape;79;p17"/>
           <p:cNvSpPr txBox="1"/>
           <p:nvPr>
             <p:ph type="title"/>
@@ -6221,7 +6485,7 @@
       </p:sp>
       <p:sp>
         <p:nvSpPr>
-          <p:cNvPr id="74" name="Google Shape;74;p16"/>
+          <p:cNvPr id="80" name="Google Shape;80;p17"/>
           <p:cNvSpPr txBox="1"/>
           <p:nvPr>
             <p:ph idx="1" type="body"/>
@@ -6230,7 +6494,7 @@
         <p:spPr>
           <a:xfrm>
             <a:off x="311700" y="1152475"/>
-            <a:ext cx="8520600" cy="3416400"/>
+            <a:ext cx="8520600" cy="3834000"/>
           </a:xfrm>
           <a:prstGeom prst="rect">
             <a:avLst/>
@@ -6327,6 +6591,19 @@
               </a:rPr>
               <a:t>Marshalling</a:t>
             </a:r>
+            <a:r>
+              <a:rPr lang="ko"/>
+              <a:t> / </a:t>
+            </a:r>
+            <a:r>
+              <a:rPr lang="ko" u="sng">
+                <a:solidFill>
+                  <a:schemeClr val="hlink"/>
+                </a:solidFill>
+                <a:hlinkClick r:id="rId5"/>
+              </a:rPr>
+              <a:t>Pinvoke</a:t>
+            </a:r>
             <a:endParaRPr/>
           </a:p>
           <a:p>
@@ -6359,7 +6636,7 @@
                 <a:solidFill>
                   <a:schemeClr val="hlink"/>
                 </a:solidFill>
-                <a:hlinkClick r:id="rId5"/>
+                <a:hlinkClick r:id="rId6"/>
               </a:rPr>
               <a:t>Hooking</a:t>
             </a:r>
